--- a/第十周/第十周.pptx
+++ b/第十周/第十周.pptx
@@ -4507,9 +4507,10 @@
           <a:lstStyle/>
           <a:p>
             <a:r>
-              <a:rPr lang="zh-TW" altLang="en-US" dirty="0"/>
-              <a:t>第八週</a:t>
-            </a:r>
+              <a:rPr lang="zh-TW" altLang="en-US"/>
+              <a:t>第十週</a:t>
+            </a:r>
+            <a:endParaRPr lang="zh-TW" altLang="en-US" dirty="0"/>
           </a:p>
         </p:txBody>
       </p:sp>
